--- a/outputs/figures/Figure_3_Sampling_source_and_heterogeneity.pptx
+++ b/outputs/figures/Figure_3_Sampling_source_and_heterogeneity.pptx
@@ -10,7 +10,7 @@
   <p:sldIdLst>
     <p:sldId xmlns:r="http://schemas.openxmlformats.org/officeDocument/2006/relationships" id="256" r:id="Rc1ebb21f93e04178"/>
   </p:sldIdLst>
-  <p:sldSz cx="5981700" cy="6096000"/>
+  <p:sldSz cx="5981700" cy="6456000"/>
   <p:notesSz cx="6858000" cy="9144000"/>
 </p:presentation>
 </file>
@@ -1072,7 +1072,7 @@
         </p:nvSpPr>
         <p:spPr>
           <a:xfrm xmlns:a="http://schemas.openxmlformats.org/drawingml/2006/main">
-            <a:off x="76200" y="19050"/>
+            <a:off x="76200" y="379050"/>
             <a:ext cx="5810250" cy="266700"/>
           </a:xfrm>
           <a:prstGeom xmlns:a="http://schemas.openxmlformats.org/drawingml/2006/main" prst="rect">
@@ -1129,7 +1129,7 @@
         </p:nvSpPr>
         <p:spPr>
           <a:xfrm xmlns:a="http://schemas.openxmlformats.org/drawingml/2006/main">
-            <a:off x="76200" y="514350"/>
+            <a:off x="76200" y="874350"/>
             <a:ext cx="1428750" cy="457200"/>
           </a:xfrm>
           <a:prstGeom xmlns:a="http://schemas.openxmlformats.org/drawingml/2006/main" prst="rect">
@@ -1209,7 +1209,7 @@
         </p:nvSpPr>
         <p:spPr>
           <a:xfrm xmlns:a="http://schemas.openxmlformats.org/drawingml/2006/main">
-            <a:off x="1590675" y="533400"/>
+            <a:off x="1590675" y="893400"/>
             <a:ext cx="2316147" cy="333375"/>
           </a:xfrm>
           <a:prstGeom xmlns:a="http://schemas.openxmlformats.org/drawingml/2006/main" prst="rect">
@@ -1239,7 +1239,7 @@
         </p:nvSpPr>
         <p:spPr>
           <a:xfrm xmlns:a="http://schemas.openxmlformats.org/drawingml/2006/main">
-            <a:off x="1600200" y="590550"/>
+            <a:off x="1600200" y="950550"/>
             <a:ext cx="2297097" cy="228600"/>
           </a:xfrm>
           <a:prstGeom xmlns:a="http://schemas.openxmlformats.org/drawingml/2006/main" prst="rect">
@@ -1296,7 +1296,7 @@
         </p:nvSpPr>
         <p:spPr>
           <a:xfrm xmlns:a="http://schemas.openxmlformats.org/drawingml/2006/main">
-            <a:off x="3906822" y="533400"/>
+            <a:off x="3906822" y="893400"/>
             <a:ext cx="410194" cy="333375"/>
           </a:xfrm>
           <a:prstGeom xmlns:a="http://schemas.openxmlformats.org/drawingml/2006/main" prst="rect">
@@ -1326,7 +1326,7 @@
         </p:nvSpPr>
         <p:spPr>
           <a:xfrm xmlns:a="http://schemas.openxmlformats.org/drawingml/2006/main">
-            <a:off x="3916347" y="590550"/>
+            <a:off x="3916347" y="950550"/>
             <a:ext cx="391144" cy="228600"/>
           </a:xfrm>
           <a:prstGeom xmlns:a="http://schemas.openxmlformats.org/drawingml/2006/main" prst="rect">
@@ -1346,7 +1346,7 @@
             <a:pPr algn="ctr">
               <a:defRPr sz="900" b="0">
                 <a:solidFill>
-                  <a:srgbClr val="FFFFFF"/>
+                  <a:srgbClr val="242424"/>
                 </a:solidFill>
                 <a:latin typeface="Arial"/>
                 <a:ea typeface="Arial"/>
@@ -1356,7 +1356,7 @@
             <a:r>
               <a:rPr sz="900" b="0">
                 <a:solidFill>
-                  <a:srgbClr val="FFFFFF"/>
+                  <a:srgbClr val="242424"/>
                 </a:solidFill>
                 <a:latin typeface="Arial"/>
                 <a:ea typeface="Arial"/>
@@ -1383,7 +1383,7 @@
         </p:nvSpPr>
         <p:spPr>
           <a:xfrm xmlns:a="http://schemas.openxmlformats.org/drawingml/2006/main">
-            <a:off x="4317016" y="533400"/>
+            <a:off x="4317016" y="893400"/>
             <a:ext cx="1417034" cy="333375"/>
           </a:xfrm>
           <a:prstGeom xmlns:a="http://schemas.openxmlformats.org/drawingml/2006/main" prst="rect">
@@ -1413,7 +1413,7 @@
         </p:nvSpPr>
         <p:spPr>
           <a:xfrm xmlns:a="http://schemas.openxmlformats.org/drawingml/2006/main">
-            <a:off x="4326541" y="590550"/>
+            <a:off x="4326541" y="950550"/>
             <a:ext cx="1397984" cy="228600"/>
           </a:xfrm>
           <a:prstGeom xmlns:a="http://schemas.openxmlformats.org/drawingml/2006/main" prst="rect">
@@ -1470,7 +1470,7 @@
         </p:nvSpPr>
         <p:spPr>
           <a:xfrm xmlns:a="http://schemas.openxmlformats.org/drawingml/2006/main">
-            <a:off x="76200" y="1104900"/>
+            <a:off x="76200" y="1464900"/>
             <a:ext cx="1428750" cy="457200"/>
           </a:xfrm>
           <a:prstGeom xmlns:a="http://schemas.openxmlformats.org/drawingml/2006/main" prst="rect">
@@ -1550,7 +1550,7 @@
         </p:nvSpPr>
         <p:spPr>
           <a:xfrm xmlns:a="http://schemas.openxmlformats.org/drawingml/2006/main">
-            <a:off x="1590675" y="1123950"/>
+            <a:off x="1590675" y="1483950"/>
             <a:ext cx="1414929" cy="333375"/>
           </a:xfrm>
           <a:prstGeom xmlns:a="http://schemas.openxmlformats.org/drawingml/2006/main" prst="rect">
@@ -1580,7 +1580,7 @@
         </p:nvSpPr>
         <p:spPr>
           <a:xfrm xmlns:a="http://schemas.openxmlformats.org/drawingml/2006/main">
-            <a:off x="1600200" y="1181100"/>
+            <a:off x="1600200" y="1541100"/>
             <a:ext cx="1395879" cy="228600"/>
           </a:xfrm>
           <a:prstGeom xmlns:a="http://schemas.openxmlformats.org/drawingml/2006/main" prst="rect">
@@ -1637,7 +1637,7 @@
         </p:nvSpPr>
         <p:spPr>
           <a:xfrm xmlns:a="http://schemas.openxmlformats.org/drawingml/2006/main">
-            <a:off x="3005604" y="1123950"/>
+            <a:off x="3005604" y="1483950"/>
             <a:ext cx="621379" cy="333375"/>
           </a:xfrm>
           <a:prstGeom xmlns:a="http://schemas.openxmlformats.org/drawingml/2006/main" prst="rect">
@@ -1667,7 +1667,7 @@
         </p:nvSpPr>
         <p:spPr>
           <a:xfrm xmlns:a="http://schemas.openxmlformats.org/drawingml/2006/main">
-            <a:off x="3015129" y="1181100"/>
+            <a:off x="3015129" y="1541100"/>
             <a:ext cx="602329" cy="228600"/>
           </a:xfrm>
           <a:prstGeom xmlns:a="http://schemas.openxmlformats.org/drawingml/2006/main" prst="rect">
@@ -1687,7 +1687,7 @@
             <a:pPr algn="ctr">
               <a:defRPr sz="900" b="0">
                 <a:solidFill>
-                  <a:srgbClr val="FFFFFF"/>
+                  <a:srgbClr val="242424"/>
                 </a:solidFill>
                 <a:latin typeface="Arial"/>
                 <a:ea typeface="Arial"/>
@@ -1697,7 +1697,7 @@
             <a:r>
               <a:rPr sz="900" b="0">
                 <a:solidFill>
-                  <a:srgbClr val="FFFFFF"/>
+                  <a:srgbClr val="242424"/>
                 </a:solidFill>
                 <a:latin typeface="Arial"/>
                 <a:ea typeface="Arial"/>
@@ -1724,7 +1724,7 @@
         </p:nvSpPr>
         <p:spPr>
           <a:xfrm xmlns:a="http://schemas.openxmlformats.org/drawingml/2006/main">
-            <a:off x="3626984" y="1123950"/>
+            <a:off x="3626984" y="1483950"/>
             <a:ext cx="2107066" cy="333375"/>
           </a:xfrm>
           <a:prstGeom xmlns:a="http://schemas.openxmlformats.org/drawingml/2006/main" prst="rect">
@@ -1754,7 +1754,7 @@
         </p:nvSpPr>
         <p:spPr>
           <a:xfrm xmlns:a="http://schemas.openxmlformats.org/drawingml/2006/main">
-            <a:off x="3636509" y="1181100"/>
+            <a:off x="3636509" y="1541100"/>
             <a:ext cx="2088016" cy="228600"/>
           </a:xfrm>
           <a:prstGeom xmlns:a="http://schemas.openxmlformats.org/drawingml/2006/main" prst="rect">
@@ -1811,7 +1811,7 @@
         </p:nvSpPr>
         <p:spPr>
           <a:xfrm xmlns:a="http://schemas.openxmlformats.org/drawingml/2006/main">
-            <a:off x="76200" y="1695450"/>
+            <a:off x="76200" y="2055450"/>
             <a:ext cx="1428750" cy="457200"/>
           </a:xfrm>
           <a:prstGeom xmlns:a="http://schemas.openxmlformats.org/drawingml/2006/main" prst="rect">
@@ -1891,7 +1891,7 @@
         </p:nvSpPr>
         <p:spPr>
           <a:xfrm xmlns:a="http://schemas.openxmlformats.org/drawingml/2006/main">
-            <a:off x="1590675" y="1714500"/>
+            <a:off x="1590675" y="2074500"/>
             <a:ext cx="3126306" cy="333375"/>
           </a:xfrm>
           <a:prstGeom xmlns:a="http://schemas.openxmlformats.org/drawingml/2006/main" prst="rect">
@@ -1921,7 +1921,7 @@
         </p:nvSpPr>
         <p:spPr>
           <a:xfrm xmlns:a="http://schemas.openxmlformats.org/drawingml/2006/main">
-            <a:off x="1600200" y="1771650"/>
+            <a:off x="1600200" y="2131650"/>
             <a:ext cx="3107256" cy="228600"/>
           </a:xfrm>
           <a:prstGeom xmlns:a="http://schemas.openxmlformats.org/drawingml/2006/main" prst="rect">
@@ -1978,7 +1978,7 @@
         </p:nvSpPr>
         <p:spPr>
           <a:xfrm xmlns:a="http://schemas.openxmlformats.org/drawingml/2006/main">
-            <a:off x="4716981" y="1714500"/>
+            <a:off x="4716981" y="2074500"/>
             <a:ext cx="204487" cy="333375"/>
           </a:xfrm>
           <a:prstGeom xmlns:a="http://schemas.openxmlformats.org/drawingml/2006/main" prst="rect">
@@ -2008,7 +2008,7 @@
         </p:nvSpPr>
         <p:spPr>
           <a:xfrm xmlns:a="http://schemas.openxmlformats.org/drawingml/2006/main">
-            <a:off x="4921468" y="1714500"/>
+            <a:off x="4921468" y="2074500"/>
             <a:ext cx="812582" cy="333375"/>
           </a:xfrm>
           <a:prstGeom xmlns:a="http://schemas.openxmlformats.org/drawingml/2006/main" prst="rect">
@@ -2038,7 +2038,7 @@
         </p:nvSpPr>
         <p:spPr>
           <a:xfrm xmlns:a="http://schemas.openxmlformats.org/drawingml/2006/main">
-            <a:off x="4930993" y="1771650"/>
+            <a:off x="4930993" y="2131650"/>
             <a:ext cx="793532" cy="228600"/>
           </a:xfrm>
           <a:prstGeom xmlns:a="http://schemas.openxmlformats.org/drawingml/2006/main" prst="rect">
@@ -2095,7 +2095,7 @@
         </p:nvSpPr>
         <p:spPr>
           <a:xfrm xmlns:a="http://schemas.openxmlformats.org/drawingml/2006/main">
-            <a:off x="76200" y="2286000"/>
+            <a:off x="76200" y="2646000"/>
             <a:ext cx="1428750" cy="457200"/>
           </a:xfrm>
           <a:prstGeom xmlns:a="http://schemas.openxmlformats.org/drawingml/2006/main" prst="rect">
@@ -2175,7 +2175,7 @@
         </p:nvSpPr>
         <p:spPr>
           <a:xfrm xmlns:a="http://schemas.openxmlformats.org/drawingml/2006/main">
-            <a:off x="1590675" y="2305050"/>
+            <a:off x="1590675" y="2665050"/>
             <a:ext cx="4143375" cy="333375"/>
           </a:xfrm>
           <a:prstGeom xmlns:a="http://schemas.openxmlformats.org/drawingml/2006/main" prst="rect">
@@ -2205,7 +2205,7 @@
         </p:nvSpPr>
         <p:spPr>
           <a:xfrm xmlns:a="http://schemas.openxmlformats.org/drawingml/2006/main">
-            <a:off x="1600200" y="2362200"/>
+            <a:off x="1600200" y="2722200"/>
             <a:ext cx="4124325" cy="228600"/>
           </a:xfrm>
           <a:prstGeom xmlns:a="http://schemas.openxmlformats.org/drawingml/2006/main" prst="rect">
@@ -2262,7 +2262,7 @@
         </p:nvSpPr>
         <p:spPr>
           <a:xfrm xmlns:a="http://schemas.openxmlformats.org/drawingml/2006/main">
-            <a:off x="1590675" y="2066925"/>
+            <a:off x="1590675" y="2426925"/>
             <a:ext cx="2476500" cy="190500"/>
           </a:xfrm>
           <a:prstGeom xmlns:a="http://schemas.openxmlformats.org/drawingml/2006/main" prst="rect">
@@ -2319,7 +2319,7 @@
         </p:nvSpPr>
         <p:spPr>
           <a:xfrm xmlns:a="http://schemas.openxmlformats.org/drawingml/2006/main">
-            <a:off x="1400175" y="2771775"/>
+            <a:off x="1400175" y="3131775"/>
             <a:ext cx="381000" cy="200025"/>
           </a:xfrm>
           <a:prstGeom xmlns:a="http://schemas.openxmlformats.org/drawingml/2006/main" prst="rect">
@@ -2376,7 +2376,7 @@
         </p:nvSpPr>
         <p:spPr>
           <a:xfrm xmlns:a="http://schemas.openxmlformats.org/drawingml/2006/main">
-            <a:off x="2436019" y="2771775"/>
+            <a:off x="2436019" y="3131775"/>
             <a:ext cx="381000" cy="200025"/>
           </a:xfrm>
           <a:prstGeom xmlns:a="http://schemas.openxmlformats.org/drawingml/2006/main" prst="rect">
@@ -2433,7 +2433,7 @@
         </p:nvSpPr>
         <p:spPr>
           <a:xfrm xmlns:a="http://schemas.openxmlformats.org/drawingml/2006/main">
-            <a:off x="3471863" y="2771775"/>
+            <a:off x="3471863" y="3131775"/>
             <a:ext cx="381000" cy="200025"/>
           </a:xfrm>
           <a:prstGeom xmlns:a="http://schemas.openxmlformats.org/drawingml/2006/main" prst="rect">
@@ -2490,7 +2490,7 @@
         </p:nvSpPr>
         <p:spPr>
           <a:xfrm xmlns:a="http://schemas.openxmlformats.org/drawingml/2006/main">
-            <a:off x="4507706" y="2771775"/>
+            <a:off x="4507706" y="3131775"/>
             <a:ext cx="381000" cy="200025"/>
           </a:xfrm>
           <a:prstGeom xmlns:a="http://schemas.openxmlformats.org/drawingml/2006/main" prst="rect">
@@ -2547,7 +2547,7 @@
         </p:nvSpPr>
         <p:spPr>
           <a:xfrm xmlns:a="http://schemas.openxmlformats.org/drawingml/2006/main">
-            <a:off x="5543550" y="2771775"/>
+            <a:off x="5543550" y="3131775"/>
             <a:ext cx="381000" cy="200025"/>
           </a:xfrm>
           <a:prstGeom xmlns:a="http://schemas.openxmlformats.org/drawingml/2006/main" prst="rect">
@@ -2604,7 +2604,7 @@
         </p:nvSpPr>
         <p:spPr>
           <a:xfrm xmlns:a="http://schemas.openxmlformats.org/drawingml/2006/main">
-            <a:off x="1590675" y="2990850"/>
+            <a:off x="1590675" y="3350850"/>
             <a:ext cx="4143375" cy="238125"/>
           </a:xfrm>
           <a:prstGeom xmlns:a="http://schemas.openxmlformats.org/drawingml/2006/main" prst="rect">
@@ -2661,7 +2661,7 @@
         </p:nvSpPr>
         <p:spPr>
           <a:xfrm xmlns:a="http://schemas.openxmlformats.org/drawingml/2006/main">
-            <a:off x="1590675" y="3324225"/>
+            <a:off x="1590675" y="3684225"/>
             <a:ext cx="104775" cy="104775"/>
           </a:xfrm>
           <a:prstGeom xmlns:a="http://schemas.openxmlformats.org/drawingml/2006/main" prst="rect">
@@ -2691,7 +2691,7 @@
         </p:nvSpPr>
         <p:spPr>
           <a:xfrm xmlns:a="http://schemas.openxmlformats.org/drawingml/2006/main">
-            <a:off x="1752600" y="3286125"/>
+            <a:off x="1752600" y="3646125"/>
             <a:ext cx="2476500" cy="209550"/>
           </a:xfrm>
           <a:prstGeom xmlns:a="http://schemas.openxmlformats.org/drawingml/2006/main" prst="rect">
@@ -2748,7 +2748,7 @@
         </p:nvSpPr>
         <p:spPr>
           <a:xfrm xmlns:a="http://schemas.openxmlformats.org/drawingml/2006/main">
-            <a:off x="1590675" y="3543300"/>
+            <a:off x="1590675" y="3903300"/>
             <a:ext cx="104775" cy="104775"/>
           </a:xfrm>
           <a:prstGeom xmlns:a="http://schemas.openxmlformats.org/drawingml/2006/main" prst="rect">
@@ -2778,7 +2778,7 @@
         </p:nvSpPr>
         <p:spPr>
           <a:xfrm xmlns:a="http://schemas.openxmlformats.org/drawingml/2006/main">
-            <a:off x="1752600" y="3505200"/>
+            <a:off x="1752600" y="3865200"/>
             <a:ext cx="2476500" cy="209550"/>
           </a:xfrm>
           <a:prstGeom xmlns:a="http://schemas.openxmlformats.org/drawingml/2006/main" prst="rect">
@@ -2835,7 +2835,7 @@
         </p:nvSpPr>
         <p:spPr>
           <a:xfrm xmlns:a="http://schemas.openxmlformats.org/drawingml/2006/main">
-            <a:off x="1590675" y="3762375"/>
+            <a:off x="1590675" y="4122375"/>
             <a:ext cx="104775" cy="104775"/>
           </a:xfrm>
           <a:prstGeom xmlns:a="http://schemas.openxmlformats.org/drawingml/2006/main" prst="rect">
@@ -2865,7 +2865,7 @@
         </p:nvSpPr>
         <p:spPr>
           <a:xfrm xmlns:a="http://schemas.openxmlformats.org/drawingml/2006/main">
-            <a:off x="1752600" y="3724275"/>
+            <a:off x="1752600" y="4084275"/>
             <a:ext cx="2476500" cy="209550"/>
           </a:xfrm>
           <a:prstGeom xmlns:a="http://schemas.openxmlformats.org/drawingml/2006/main" prst="rect">
@@ -2922,7 +2922,7 @@
         </p:nvSpPr>
         <p:spPr>
           <a:xfrm xmlns:a="http://schemas.openxmlformats.org/drawingml/2006/main">
-            <a:off x="76200" y="4067175"/>
+            <a:off x="76200" y="4427175"/>
             <a:ext cx="2857500" cy="266700"/>
           </a:xfrm>
           <a:prstGeom xmlns:a="http://schemas.openxmlformats.org/drawingml/2006/main" prst="rect">
@@ -2979,7 +2979,7 @@
         </p:nvSpPr>
         <p:spPr>
           <a:xfrm xmlns:a="http://schemas.openxmlformats.org/drawingml/2006/main">
-            <a:off x="3124200" y="4067175"/>
+            <a:off x="3124200" y="4427175"/>
             <a:ext cx="2781300" cy="266700"/>
           </a:xfrm>
           <a:prstGeom xmlns:a="http://schemas.openxmlformats.org/drawingml/2006/main" prst="rect">
@@ -3036,7 +3036,7 @@
         </p:nvSpPr>
         <p:spPr>
           <a:xfrm xmlns:a="http://schemas.openxmlformats.org/drawingml/2006/main">
-            <a:off x="352425" y="5153025"/>
+            <a:off x="352425" y="5513025"/>
             <a:ext cx="2381250" cy="9525"/>
           </a:xfrm>
           <a:prstGeom xmlns:a="http://schemas.openxmlformats.org/drawingml/2006/main" prst="rect">
@@ -3066,7 +3066,7 @@
         </p:nvSpPr>
         <p:spPr>
           <a:xfrm xmlns:a="http://schemas.openxmlformats.org/drawingml/2006/main">
-            <a:off x="352425" y="5133975"/>
+            <a:off x="352425" y="5493975"/>
             <a:ext cx="9525" cy="47625"/>
           </a:xfrm>
           <a:prstGeom xmlns:a="http://schemas.openxmlformats.org/drawingml/2006/main" prst="rect">
@@ -3096,7 +3096,7 @@
         </p:nvSpPr>
         <p:spPr>
           <a:xfrm xmlns:a="http://schemas.openxmlformats.org/drawingml/2006/main">
-            <a:off x="180975" y="5219700"/>
+            <a:off x="180975" y="5579700"/>
             <a:ext cx="342900" cy="190500"/>
           </a:xfrm>
           <a:prstGeom xmlns:a="http://schemas.openxmlformats.org/drawingml/2006/main" prst="rect">
@@ -3153,7 +3153,7 @@
         </p:nvSpPr>
         <p:spPr>
           <a:xfrm xmlns:a="http://schemas.openxmlformats.org/drawingml/2006/main">
-            <a:off x="947738" y="5133975"/>
+            <a:off x="947738" y="5493975"/>
             <a:ext cx="9525" cy="47625"/>
           </a:xfrm>
           <a:prstGeom xmlns:a="http://schemas.openxmlformats.org/drawingml/2006/main" prst="rect">
@@ -3183,7 +3183,7 @@
         </p:nvSpPr>
         <p:spPr>
           <a:xfrm xmlns:a="http://schemas.openxmlformats.org/drawingml/2006/main">
-            <a:off x="776288" y="5219700"/>
+            <a:off x="776288" y="5579700"/>
             <a:ext cx="342900" cy="190500"/>
           </a:xfrm>
           <a:prstGeom xmlns:a="http://schemas.openxmlformats.org/drawingml/2006/main" prst="rect">
@@ -3240,7 +3240,7 @@
         </p:nvSpPr>
         <p:spPr>
           <a:xfrm xmlns:a="http://schemas.openxmlformats.org/drawingml/2006/main">
-            <a:off x="1543050" y="5133975"/>
+            <a:off x="1543050" y="5493975"/>
             <a:ext cx="9525" cy="47625"/>
           </a:xfrm>
           <a:prstGeom xmlns:a="http://schemas.openxmlformats.org/drawingml/2006/main" prst="rect">
@@ -3270,7 +3270,7 @@
         </p:nvSpPr>
         <p:spPr>
           <a:xfrm xmlns:a="http://schemas.openxmlformats.org/drawingml/2006/main">
-            <a:off x="1371600" y="5219700"/>
+            <a:off x="1371600" y="5579700"/>
             <a:ext cx="342900" cy="190500"/>
           </a:xfrm>
           <a:prstGeom xmlns:a="http://schemas.openxmlformats.org/drawingml/2006/main" prst="rect">
@@ -3327,7 +3327,7 @@
         </p:nvSpPr>
         <p:spPr>
           <a:xfrm xmlns:a="http://schemas.openxmlformats.org/drawingml/2006/main">
-            <a:off x="2138363" y="5133975"/>
+            <a:off x="2138363" y="5493975"/>
             <a:ext cx="9525" cy="47625"/>
           </a:xfrm>
           <a:prstGeom xmlns:a="http://schemas.openxmlformats.org/drawingml/2006/main" prst="rect">
@@ -3357,7 +3357,7 @@
         </p:nvSpPr>
         <p:spPr>
           <a:xfrm xmlns:a="http://schemas.openxmlformats.org/drawingml/2006/main">
-            <a:off x="1966913" y="5219700"/>
+            <a:off x="1966913" y="5579700"/>
             <a:ext cx="342900" cy="190500"/>
           </a:xfrm>
           <a:prstGeom xmlns:a="http://schemas.openxmlformats.org/drawingml/2006/main" prst="rect">
@@ -3414,7 +3414,7 @@
         </p:nvSpPr>
         <p:spPr>
           <a:xfrm xmlns:a="http://schemas.openxmlformats.org/drawingml/2006/main">
-            <a:off x="2733675" y="5133975"/>
+            <a:off x="2733675" y="5493975"/>
             <a:ext cx="9525" cy="47625"/>
           </a:xfrm>
           <a:prstGeom xmlns:a="http://schemas.openxmlformats.org/drawingml/2006/main" prst="rect">
@@ -3444,7 +3444,7 @@
         </p:nvSpPr>
         <p:spPr>
           <a:xfrm xmlns:a="http://schemas.openxmlformats.org/drawingml/2006/main">
-            <a:off x="2562225" y="5219700"/>
+            <a:off x="2562225" y="5579700"/>
             <a:ext cx="342900" cy="190500"/>
           </a:xfrm>
           <a:prstGeom xmlns:a="http://schemas.openxmlformats.org/drawingml/2006/main" prst="rect">
@@ -3501,7 +3501,7 @@
         </p:nvSpPr>
         <p:spPr>
           <a:xfrm xmlns:a="http://schemas.openxmlformats.org/drawingml/2006/main">
-            <a:off x="431006" y="4857750"/>
+            <a:off x="431006" y="5217750"/>
             <a:ext cx="1588294" cy="12383"/>
           </a:xfrm>
           <a:prstGeom xmlns:a="http://schemas.openxmlformats.org/drawingml/2006/main" prst="rect">
@@ -3531,7 +3531,7 @@
         </p:nvSpPr>
         <p:spPr>
           <a:xfrm xmlns:a="http://schemas.openxmlformats.org/drawingml/2006/main">
-            <a:off x="431006" y="4810125"/>
+            <a:off x="431006" y="5170125"/>
             <a:ext cx="9525" cy="95250"/>
           </a:xfrm>
           <a:prstGeom xmlns:a="http://schemas.openxmlformats.org/drawingml/2006/main" prst="rect">
@@ -3561,7 +3561,7 @@
         </p:nvSpPr>
         <p:spPr>
           <a:xfrm xmlns:a="http://schemas.openxmlformats.org/drawingml/2006/main">
-            <a:off x="2019300" y="4810125"/>
+            <a:off x="2019300" y="5170125"/>
             <a:ext cx="9525" cy="95250"/>
           </a:xfrm>
           <a:prstGeom xmlns:a="http://schemas.openxmlformats.org/drawingml/2006/main" prst="rect">
@@ -3591,7 +3591,7 @@
         </p:nvSpPr>
         <p:spPr>
           <a:xfrm xmlns:a="http://schemas.openxmlformats.org/drawingml/2006/main">
-            <a:off x="942975" y="4829175"/>
+            <a:off x="942975" y="5189175"/>
             <a:ext cx="604838" cy="57150"/>
           </a:xfrm>
           <a:prstGeom xmlns:a="http://schemas.openxmlformats.org/drawingml/2006/main" prst="rect">
@@ -3621,7 +3621,7 @@
         </p:nvSpPr>
         <p:spPr>
           <a:xfrm xmlns:a="http://schemas.openxmlformats.org/drawingml/2006/main">
-            <a:off x="1188244" y="4819650"/>
+            <a:off x="1188244" y="5179650"/>
             <a:ext cx="76200" cy="76200"/>
           </a:xfrm>
           <a:prstGeom xmlns:a="http://schemas.openxmlformats.org/drawingml/2006/main" prst="ellipse">
@@ -3651,7 +3651,7 @@
         </p:nvSpPr>
         <p:spPr>
           <a:xfrm xmlns:a="http://schemas.openxmlformats.org/drawingml/2006/main">
-            <a:off x="323850" y="4562475"/>
+            <a:off x="323850" y="4922475"/>
             <a:ext cx="2438400" cy="238125"/>
           </a:xfrm>
           <a:prstGeom xmlns:a="http://schemas.openxmlformats.org/drawingml/2006/main" prst="rect">
@@ -3708,7 +3708,7 @@
         </p:nvSpPr>
         <p:spPr>
           <a:xfrm xmlns:a="http://schemas.openxmlformats.org/drawingml/2006/main">
-            <a:off x="323850" y="5505450"/>
+            <a:off x="323850" y="5865450"/>
             <a:ext cx="2438400" cy="323850"/>
           </a:xfrm>
           <a:prstGeom xmlns:a="http://schemas.openxmlformats.org/drawingml/2006/main" prst="rect">
@@ -3765,7 +3765,7 @@
         </p:nvSpPr>
         <p:spPr>
           <a:xfrm xmlns:a="http://schemas.openxmlformats.org/drawingml/2006/main">
-            <a:off x="3286125" y="5153025"/>
+            <a:off x="3286125" y="5513025"/>
             <a:ext cx="2381250" cy="9525"/>
           </a:xfrm>
           <a:prstGeom xmlns:a="http://schemas.openxmlformats.org/drawingml/2006/main" prst="rect">
@@ -3795,7 +3795,7 @@
         </p:nvSpPr>
         <p:spPr>
           <a:xfrm xmlns:a="http://schemas.openxmlformats.org/drawingml/2006/main">
-            <a:off x="3286125" y="5133975"/>
+            <a:off x="3286125" y="5493975"/>
             <a:ext cx="9525" cy="47625"/>
           </a:xfrm>
           <a:prstGeom xmlns:a="http://schemas.openxmlformats.org/drawingml/2006/main" prst="rect">
@@ -3825,7 +3825,7 @@
         </p:nvSpPr>
         <p:spPr>
           <a:xfrm xmlns:a="http://schemas.openxmlformats.org/drawingml/2006/main">
-            <a:off x="3114675" y="5219700"/>
+            <a:off x="3114675" y="5579700"/>
             <a:ext cx="342900" cy="190500"/>
           </a:xfrm>
           <a:prstGeom xmlns:a="http://schemas.openxmlformats.org/drawingml/2006/main" prst="rect">
@@ -3882,7 +3882,7 @@
         </p:nvSpPr>
         <p:spPr>
           <a:xfrm xmlns:a="http://schemas.openxmlformats.org/drawingml/2006/main">
-            <a:off x="3881438" y="5133975"/>
+            <a:off x="3881438" y="5493975"/>
             <a:ext cx="9525" cy="47625"/>
           </a:xfrm>
           <a:prstGeom xmlns:a="http://schemas.openxmlformats.org/drawingml/2006/main" prst="rect">
@@ -3912,7 +3912,7 @@
         </p:nvSpPr>
         <p:spPr>
           <a:xfrm xmlns:a="http://schemas.openxmlformats.org/drawingml/2006/main">
-            <a:off x="3709988" y="5219700"/>
+            <a:off x="3709988" y="5579700"/>
             <a:ext cx="342900" cy="190500"/>
           </a:xfrm>
           <a:prstGeom xmlns:a="http://schemas.openxmlformats.org/drawingml/2006/main" prst="rect">
@@ -3969,7 +3969,7 @@
         </p:nvSpPr>
         <p:spPr>
           <a:xfrm xmlns:a="http://schemas.openxmlformats.org/drawingml/2006/main">
-            <a:off x="4476750" y="5133975"/>
+            <a:off x="4476750" y="5493975"/>
             <a:ext cx="9525" cy="47625"/>
           </a:xfrm>
           <a:prstGeom xmlns:a="http://schemas.openxmlformats.org/drawingml/2006/main" prst="rect">
@@ -3999,7 +3999,7 @@
         </p:nvSpPr>
         <p:spPr>
           <a:xfrm xmlns:a="http://schemas.openxmlformats.org/drawingml/2006/main">
-            <a:off x="4305300" y="5219700"/>
+            <a:off x="4305300" y="5579700"/>
             <a:ext cx="342900" cy="190500"/>
           </a:xfrm>
           <a:prstGeom xmlns:a="http://schemas.openxmlformats.org/drawingml/2006/main" prst="rect">
@@ -4056,7 +4056,7 @@
         </p:nvSpPr>
         <p:spPr>
           <a:xfrm xmlns:a="http://schemas.openxmlformats.org/drawingml/2006/main">
-            <a:off x="5072063" y="5133975"/>
+            <a:off x="5072063" y="5493975"/>
             <a:ext cx="9525" cy="47625"/>
           </a:xfrm>
           <a:prstGeom xmlns:a="http://schemas.openxmlformats.org/drawingml/2006/main" prst="rect">
@@ -4086,7 +4086,7 @@
         </p:nvSpPr>
         <p:spPr>
           <a:xfrm xmlns:a="http://schemas.openxmlformats.org/drawingml/2006/main">
-            <a:off x="4900613" y="5219700"/>
+            <a:off x="4900613" y="5579700"/>
             <a:ext cx="342900" cy="190500"/>
           </a:xfrm>
           <a:prstGeom xmlns:a="http://schemas.openxmlformats.org/drawingml/2006/main" prst="rect">
@@ -4143,7 +4143,7 @@
         </p:nvSpPr>
         <p:spPr>
           <a:xfrm xmlns:a="http://schemas.openxmlformats.org/drawingml/2006/main">
-            <a:off x="5667375" y="5133975"/>
+            <a:off x="5667375" y="5493975"/>
             <a:ext cx="9525" cy="47625"/>
           </a:xfrm>
           <a:prstGeom xmlns:a="http://schemas.openxmlformats.org/drawingml/2006/main" prst="rect">
@@ -4173,7 +4173,7 @@
         </p:nvSpPr>
         <p:spPr>
           <a:xfrm xmlns:a="http://schemas.openxmlformats.org/drawingml/2006/main">
-            <a:off x="5495925" y="5219700"/>
+            <a:off x="5495925" y="5579700"/>
             <a:ext cx="342900" cy="190500"/>
           </a:xfrm>
           <a:prstGeom xmlns:a="http://schemas.openxmlformats.org/drawingml/2006/main" prst="rect">
@@ -4230,7 +4230,7 @@
         </p:nvSpPr>
         <p:spPr>
           <a:xfrm xmlns:a="http://schemas.openxmlformats.org/drawingml/2006/main">
-            <a:off x="4476750" y="4829175"/>
+            <a:off x="4476750" y="5189175"/>
             <a:ext cx="1190625" cy="57150"/>
           </a:xfrm>
           <a:prstGeom xmlns:a="http://schemas.openxmlformats.org/drawingml/2006/main" prst="rect">
@@ -4260,7 +4260,7 @@
         </p:nvSpPr>
         <p:spPr>
           <a:xfrm xmlns:a="http://schemas.openxmlformats.org/drawingml/2006/main">
-            <a:off x="4836319" y="4819650"/>
+            <a:off x="4836319" y="5179650"/>
             <a:ext cx="76200" cy="76200"/>
           </a:xfrm>
           <a:prstGeom xmlns:a="http://schemas.openxmlformats.org/drawingml/2006/main" prst="ellipse">
@@ -4290,7 +4290,7 @@
         </p:nvSpPr>
         <p:spPr>
           <a:xfrm xmlns:a="http://schemas.openxmlformats.org/drawingml/2006/main">
-            <a:off x="3257550" y="4562475"/>
+            <a:off x="3257550" y="4922475"/>
             <a:ext cx="2438400" cy="238125"/>
           </a:xfrm>
           <a:prstGeom xmlns:a="http://schemas.openxmlformats.org/drawingml/2006/main" prst="rect">
@@ -4347,7 +4347,7 @@
         </p:nvSpPr>
         <p:spPr>
           <a:xfrm xmlns:a="http://schemas.openxmlformats.org/drawingml/2006/main">
-            <a:off x="3257550" y="5505450"/>
+            <a:off x="3257550" y="5865450"/>
             <a:ext cx="2438400" cy="323850"/>
           </a:xfrm>
           <a:prstGeom xmlns:a="http://schemas.openxmlformats.org/drawingml/2006/main" prst="rect">
@@ -4404,7 +4404,7 @@
         </p:nvSpPr>
         <p:spPr>
           <a:xfrm xmlns:a="http://schemas.openxmlformats.org/drawingml/2006/main">
-            <a:off x="266700" y="5800725"/>
+            <a:off x="266700" y="6160725"/>
             <a:ext cx="5467350" cy="238125"/>
           </a:xfrm>
           <a:prstGeom xmlns:a="http://schemas.openxmlformats.org/drawingml/2006/main" prst="rect">
